--- a/public/fun/pack/pptx/wedding/결혼식_41_소개중심_아랫목.pptx
+++ b/public/fun/pack/pptx/wedding/결혼식_41_소개중심_아랫목.pptx
@@ -3286,6 +3286,14 @@
 <file path=ppt/slides/slide1.xml><?xml version="1.0" encoding="utf-8"?>
 <p:sld xmlns:a="http://schemas.openxmlformats.org/drawingml/2006/main" xmlns:p="http://schemas.openxmlformats.org/presentationml/2006/main" xmlns:r="http://schemas.openxmlformats.org/officeDocument/2006/relationships">
   <p:cSld>
+    <p:bg>
+      <p:bgPr>
+        <a:solidFill>
+          <a:srgbClr val="FBF0EC"/>
+        </a:solidFill>
+        <a:effectLst/>
+      </p:bgPr>
+    </p:bg>
     <p:spTree>
       <p:nvGrpSpPr>
         <p:cNvPr id="1" name=""/>
@@ -3293,30 +3301,120 @@
         <p:nvPr/>
       </p:nvGrpSpPr>
       <p:grpSpPr/>
-      <p:pic>
-        <p:nvPicPr>
-          <p:cNvPr id="3" name="표지 그림" descr="wedding-41.jpg"/>
-          <p:cNvPicPr>
-            <a:picLocks noChangeAspect="1"/>
-          </p:cNvPicPr>
+      <p:sp>
+        <p:nvSpPr>
+          <p:cNvPr id="3" name="사진 자리"/>
+          <p:cNvSpPr/>
           <p:nvPr/>
-        </p:nvPicPr>
-        <p:blipFill>
-          <a:blip r:embed="rId2"/>
-          <a:stretch>
-            <a:fillRect/>
-          </a:stretch>
-        </p:blipFill>
-        <p:spPr>
-          <a:xfrm>
-            <a:off x="0" y="0"/>
-            <a:ext cx="12191695" cy="6858000"/>
+        </p:nvSpPr>
+        <p:spPr>
+          <a:xfrm>
+            <a:off x="1463003" y="960120"/>
+            <a:ext cx="3657508" cy="4526280"/>
+          </a:xfrm>
+          <a:prstGeom prst="roundRect">
+            <a:avLst>
+              <a:gd name="adj" fmla="val 4000"/>
+            </a:avLst>
+          </a:prstGeom>
+          <a:solidFill>
+            <a:srgbClr val="EBBEAD"/>
+          </a:solidFill>
+          <a:ln>
+            <a:noFill/>
+          </a:ln>
+        </p:spPr>
+        <p:txBody>
+          <a:bodyPr rtlCol="0" anchor="ctr" wrap="square" lIns="54864" rIns="54864" tIns="27432" bIns="27432">
+            <a:noAutofit/>
+          </a:bodyPr>
+          <a:lstStyle/>
+          <a:p>
+            <a:pPr algn="ctr">
+              <a:lnSpc>
+                <a:spcPct val="100000"/>
+              </a:lnSpc>
+            </a:pPr>
+            <a:r>
+              <a:rPr sz="1400" b="0" i="0">
+                <a:solidFill>
+                  <a:srgbClr val="493027"/>
+                </a:solidFill>
+              </a:rPr>
+              <a:t>사진을 넣어 주세요</a:t>
+            </a:r>
+          </a:p>
+        </p:txBody>
+      </p:sp>
+      <p:sp>
+        <p:nvSpPr>
+          <p:cNvPr id="4" name="장식"/>
+          <p:cNvSpPr/>
+          <p:nvPr/>
+        </p:nvSpPr>
+        <p:spPr>
+          <a:xfrm>
+            <a:off x="975335" y="1234439"/>
+            <a:ext cx="3657508" cy="4526280"/>
+          </a:xfrm>
+          <a:prstGeom prst="roundRect">
+            <a:avLst>
+              <a:gd name="adj" fmla="val 4000"/>
+            </a:avLst>
+          </a:prstGeom>
+          <a:noFill/>
+          <a:ln w="9525">
+            <a:solidFill>
+              <a:srgbClr val="26231F"/>
+            </a:solidFill>
+          </a:ln>
+        </p:spPr>
+        <p:txBody>
+          <a:bodyPr rtlCol="0" anchor="ctr"/>
+          <a:lstStyle/>
+          <a:p>
+            <a:pPr algn="ctr"/>
+          </a:p>
+        </p:txBody>
+      </p:sp>
+      <p:sp>
+        <p:nvSpPr>
+          <p:cNvPr id="5" name="라벨"/>
+          <p:cNvSpPr txBox="1"/>
+          <p:nvPr/>
+        </p:nvSpPr>
+        <p:spPr>
+          <a:xfrm>
+            <a:off x="6827349" y="2148840"/>
+            <a:ext cx="4632844" cy="274320"/>
           </a:xfrm>
           <a:prstGeom prst="rect">
             <a:avLst/>
           </a:prstGeom>
-        </p:spPr>
-      </p:pic>
+          <a:noFill/>
+        </p:spPr>
+        <p:txBody>
+          <a:bodyPr wrap="square" lIns="54864" rIns="54864" tIns="27432" bIns="27432" anchor="t">
+            <a:noAutofit/>
+          </a:bodyPr>
+          <a:lstStyle/>
+          <a:p>
+            <a:pPr algn="l">
+              <a:lnSpc>
+                <a:spcPct val="115000"/>
+              </a:lnSpc>
+            </a:pPr>
+            <a:r>
+              <a:rPr sz="1000" b="1" i="0" spc="250">
+                <a:solidFill>
+                  <a:srgbClr val="26231F"/>
+                </a:solidFill>
+              </a:rPr>
+              <a:t>WEDDING</a:t>
+            </a:r>
+          </a:p>
+        </p:txBody>
+      </p:sp>
       <p:sp>
         <p:nvSpPr>
           <p:cNvPr id="2" name="Title 1"/>
@@ -3329,8 +3427,8 @@
         </p:nvSpPr>
         <p:spPr>
           <a:xfrm>
-            <a:off x="853418" y="2057400"/>
-            <a:ext cx="6095847" cy="1554480"/>
+            <a:off x="6827349" y="2606040"/>
+            <a:ext cx="4632844" cy="1188720"/>
           </a:xfrm>
         </p:spPr>
         <p:txBody>
@@ -3347,7 +3445,7 @@
             <a:r>
               <a:rPr sz="3600" b="1" i="0">
                 <a:solidFill>
-                  <a:srgbClr val="3B2017"/>
+                  <a:srgbClr val="26231F"/>
                 </a:solidFill>
               </a:rPr>
               <a:t>저희 결혼합니다</a:t>
@@ -3357,14 +3455,14 @@
       </p:sp>
       <p:sp>
         <p:nvSpPr>
-          <p:cNvPr id="4" name="한 줄 문구"/>
+          <p:cNvPr id="6" name="한 줄 문구"/>
           <p:cNvSpPr txBox="1"/>
           <p:nvPr/>
         </p:nvSpPr>
         <p:spPr>
           <a:xfrm>
-            <a:off x="853418" y="3749039"/>
-            <a:ext cx="6095847" cy="822960"/>
+            <a:off x="6827349" y="3886200"/>
+            <a:ext cx="4632844" cy="822960"/>
           </a:xfrm>
           <a:prstGeom prst="rect">
             <a:avLst/>
@@ -3383,9 +3481,9 @@
               </a:lnSpc>
             </a:pPr>
             <a:r>
-              <a:rPr sz="1700" b="0" i="1">
-                <a:solidFill>
-                  <a:srgbClr val="3B2017"/>
+              <a:rPr sz="1700" b="0" i="0">
+                <a:solidFill>
+                  <a:srgbClr val="26231F"/>
                 </a:solidFill>
               </a:rPr>
               <a:t>추운 날이지만 따뜻하게 모시겠습니다</a:t>
@@ -3395,14 +3493,14 @@
       </p:sp>
       <p:sp>
         <p:nvSpPr>
-          <p:cNvPr id="5" name="안내 문구"/>
+          <p:cNvPr id="7" name="안내 문구"/>
           <p:cNvSpPr txBox="1"/>
           <p:nvPr/>
         </p:nvSpPr>
         <p:spPr>
           <a:xfrm>
-            <a:off x="853418" y="4617720"/>
-            <a:ext cx="6095847" cy="914400"/>
+            <a:off x="6827349" y="4754880"/>
+            <a:ext cx="4632844" cy="914400"/>
           </a:xfrm>
           <a:prstGeom prst="rect">
             <a:avLst/>
@@ -3423,7 +3521,7 @@
             <a:r>
               <a:rPr sz="1400" b="0" i="0">
                 <a:solidFill>
-                  <a:srgbClr val="666666"/>
+                  <a:srgbClr val="26231F"/>
                 </a:solidFill>
               </a:rPr>
               <a:t>신랑 이름 ♥ 신부 이름</a:t>
@@ -3438,10 +3536,10 @@
             <a:r>
               <a:rPr sz="1400" b="0" i="0">
                 <a:solidFill>
-                  <a:srgbClr val="666666"/>
+                  <a:srgbClr val="26231F"/>
                 </a:solidFill>
               </a:rPr>
-              <a:t>2027. 00. 00 · 예식장 이름</a:t>
+              <a:t>날짜 입력 · 예식장 이름</a:t>
             </a:r>
           </a:p>
         </p:txBody>
@@ -3460,7 +3558,7 @@
     <p:bg>
       <p:bgPr>
         <a:solidFill>
-          <a:srgbClr val="EFD9D1"/>
+          <a:srgbClr val="F6DED5"/>
         </a:solidFill>
         <a:effectLst/>
       </p:bgPr>
@@ -3474,26 +3572,52 @@
       <p:grpSpPr/>
       <p:sp>
         <p:nvSpPr>
-          <p:cNvPr id="3" name="장식"/>
+          <p:cNvPr id="3" name="포인트"/>
           <p:cNvSpPr/>
           <p:nvPr/>
         </p:nvSpPr>
         <p:spPr>
           <a:xfrm>
-            <a:off x="274320" y="274320"/>
-            <a:ext cx="11643055" cy="6309360"/>
+            <a:off x="5958687" y="246888"/>
+            <a:ext cx="274320" cy="274320"/>
+          </a:xfrm>
+          <a:prstGeom prst="round2SameRect">
+            <a:avLst/>
+          </a:prstGeom>
+          <a:solidFill>
+            <a:srgbClr val="E1AC98"/>
+          </a:solidFill>
+          <a:ln>
+            <a:noFill/>
+          </a:ln>
+        </p:spPr>
+        <p:txBody>
+          <a:bodyPr rtlCol="0" anchor="ctr"/>
+          <a:lstStyle/>
+          <a:p>
+            <a:pPr algn="ctr"/>
+          </a:p>
+        </p:txBody>
+      </p:sp>
+      <p:sp>
+        <p:nvSpPr>
+          <p:cNvPr id="4" name="장식"/>
+          <p:cNvSpPr/>
+          <p:nvPr/>
+        </p:nvSpPr>
+        <p:spPr>
+          <a:xfrm>
+            <a:off x="5684367" y="1572768"/>
+            <a:ext cx="822960" cy="22860"/>
           </a:xfrm>
           <a:prstGeom prst="rect">
             <a:avLst/>
           </a:prstGeom>
           <a:solidFill>
-            <a:srgbClr val="FFFFFF"/>
+            <a:srgbClr val="E1AC98"/>
           </a:solidFill>
-          <a:ln w="25400">
-            <a:solidFill>
-              <a:srgbClr val="7D4531"/>
-            </a:solidFill>
-            <a:prstDash val="dash"/>
+          <a:ln>
+            <a:noFill/>
           </a:ln>
         </p:spPr>
         <p:txBody>
@@ -3506,19 +3630,19 @@
       </p:sp>
       <p:sp>
         <p:nvSpPr>
-          <p:cNvPr id="2" name="Title 1"/>
-          <p:cNvSpPr>
-            <a:spLocks noGrp="1"/>
-          </p:cNvSpPr>
-          <p:nvPr>
-            <p:ph type="title"/>
-          </p:nvPr>
-        </p:nvSpPr>
-        <p:spPr>
-          <a:xfrm>
-            <a:off x="777240" y="548640"/>
-            <a:ext cx="9357055" cy="822960"/>
-          </a:xfrm>
+          <p:cNvPr id="5" name="상단 라벨"/>
+          <p:cNvSpPr txBox="1"/>
+          <p:nvPr/>
+        </p:nvSpPr>
+        <p:spPr>
+          <a:xfrm>
+            <a:off x="640080" y="182880"/>
+            <a:ext cx="3657600" cy="274320"/>
+          </a:xfrm>
+          <a:prstGeom prst="rect">
+            <a:avLst/>
+          </a:prstGeom>
+          <a:noFill/>
         </p:spPr>
         <p:txBody>
           <a:bodyPr wrap="square" lIns="54864" rIns="54864" tIns="27432" bIns="27432" anchor="ctr">
@@ -3527,6 +3651,44 @@
           <a:lstStyle/>
           <a:p>
             <a:pPr algn="l">
+              <a:lnSpc>
+                <a:spcPct val="115000"/>
+              </a:lnSpc>
+            </a:pPr>
+            <a:r>
+              <a:rPr sz="800" b="1" i="0" spc="250">
+                <a:solidFill>
+                  <a:srgbClr val="8E8780"/>
+                </a:solidFill>
+              </a:rPr>
+              <a:t>WEDDING</a:t>
+            </a:r>
+          </a:p>
+        </p:txBody>
+      </p:sp>
+      <p:sp>
+        <p:nvSpPr>
+          <p:cNvPr id="2" name="Title 1"/>
+          <p:cNvSpPr>
+            <a:spLocks noGrp="1"/>
+          </p:cNvSpPr>
+          <p:nvPr>
+            <p:ph type="title"/>
+          </p:nvPr>
+        </p:nvSpPr>
+        <p:spPr>
+          <a:xfrm>
+            <a:off x="1371600" y="640080"/>
+            <a:ext cx="9448495" cy="868680"/>
+          </a:xfrm>
+        </p:spPr>
+        <p:txBody>
+          <a:bodyPr wrap="square" lIns="54864" rIns="54864" tIns="27432" bIns="27432" anchor="ctr">
+            <a:noAutofit/>
+          </a:bodyPr>
+          <a:lstStyle/>
+          <a:p>
+            <a:pPr algn="ctr">
               <a:lnSpc>
                 <a:spcPct val="105000"/>
               </a:lnSpc>
@@ -3534,7 +3696,7 @@
             <a:r>
               <a:rPr sz="3000" b="1" i="0">
                 <a:solidFill>
-                  <a:srgbClr val="3B2017"/>
+                  <a:srgbClr val="26231F"/>
                 </a:solidFill>
               </a:rPr>
               <a:t>신랑 · 신부 소개</a:t>
@@ -3544,25 +3706,23 @@
       </p:sp>
       <p:sp>
         <p:nvSpPr>
-          <p:cNvPr id="4" name="사진 자리"/>
+          <p:cNvPr id="6" name="사진 자리"/>
           <p:cNvSpPr/>
           <p:nvPr/>
         </p:nvSpPr>
         <p:spPr>
           <a:xfrm>
-            <a:off x="2042083" y="1554480"/>
-            <a:ext cx="2331720" cy="2331720"/>
+            <a:off x="1996363" y="1783080"/>
+            <a:ext cx="2286000" cy="2286000"/>
           </a:xfrm>
           <a:prstGeom prst="ellipse">
             <a:avLst/>
           </a:prstGeom>
           <a:solidFill>
-            <a:srgbClr val="EFD9D1"/>
+            <a:srgbClr val="F6DED5"/>
           </a:solidFill>
           <a:ln w="19050">
-            <a:solidFill>
-              <a:srgbClr val="7D4531"/>
-            </a:solidFill>
+            <a:noFill/>
             <a:prstDash val="dash"/>
           </a:ln>
         </p:spPr>
@@ -3580,7 +3740,7 @@
             <a:r>
               <a:rPr sz="1200" b="0" i="0">
                 <a:solidFill>
-                  <a:srgbClr val="3B2017"/>
+                  <a:srgbClr val="8E8780"/>
                 </a:solidFill>
               </a:rPr>
               <a:t>사진</a:t>
@@ -3590,14 +3750,14 @@
       </p:sp>
       <p:sp>
         <p:nvSpPr>
-          <p:cNvPr id="5" name="TextBox 4"/>
+          <p:cNvPr id="7" name="TextBox 6"/>
           <p:cNvSpPr txBox="1"/>
           <p:nvPr/>
         </p:nvSpPr>
         <p:spPr>
           <a:xfrm>
-            <a:off x="777240" y="3977639"/>
-            <a:ext cx="4861407" cy="411480"/>
+            <a:off x="640080" y="4160520"/>
+            <a:ext cx="4998567" cy="411480"/>
           </a:xfrm>
           <a:prstGeom prst="rect">
             <a:avLst/>
@@ -3618,7 +3778,7 @@
             <a:r>
               <a:rPr sz="1600" b="1" i="0">
                 <a:solidFill>
-                  <a:srgbClr val="3B2017"/>
+                  <a:srgbClr val="493027"/>
                 </a:solidFill>
               </a:rPr>
               <a:t>신랑</a:t>
@@ -3628,14 +3788,14 @@
       </p:sp>
       <p:sp>
         <p:nvSpPr>
-          <p:cNvPr id="6" name="TextBox 5"/>
+          <p:cNvPr id="8" name="TextBox 7"/>
           <p:cNvSpPr txBox="1"/>
           <p:nvPr/>
         </p:nvSpPr>
         <p:spPr>
           <a:xfrm>
-            <a:off x="868680" y="4434840"/>
-            <a:ext cx="4678527" cy="1783079"/>
+            <a:off x="731519" y="4617720"/>
+            <a:ext cx="4815687" cy="1737360"/>
           </a:xfrm>
           <a:prstGeom prst="rect">
             <a:avLst/>
@@ -3696,25 +3856,23 @@
       </p:sp>
       <p:sp>
         <p:nvSpPr>
-          <p:cNvPr id="7" name="사진 자리"/>
+          <p:cNvPr id="9" name="사진 자리"/>
           <p:cNvSpPr/>
           <p:nvPr/>
         </p:nvSpPr>
         <p:spPr>
           <a:xfrm>
-            <a:off x="7817891" y="1554480"/>
-            <a:ext cx="2331720" cy="2331720"/>
+            <a:off x="7909331" y="1783080"/>
+            <a:ext cx="2286000" cy="2286000"/>
           </a:xfrm>
           <a:prstGeom prst="ellipse">
             <a:avLst/>
           </a:prstGeom>
           <a:solidFill>
-            <a:srgbClr val="EFD9D1"/>
+            <a:srgbClr val="F6DED5"/>
           </a:solidFill>
           <a:ln w="19050">
-            <a:solidFill>
-              <a:srgbClr val="7D4531"/>
-            </a:solidFill>
+            <a:noFill/>
             <a:prstDash val="dash"/>
           </a:ln>
         </p:spPr>
@@ -3732,7 +3890,7 @@
             <a:r>
               <a:rPr sz="1200" b="0" i="0">
                 <a:solidFill>
-                  <a:srgbClr val="3B2017"/>
+                  <a:srgbClr val="8E8780"/>
                 </a:solidFill>
               </a:rPr>
               <a:t>사진</a:t>
@@ -3742,14 +3900,14 @@
       </p:sp>
       <p:sp>
         <p:nvSpPr>
-          <p:cNvPr id="8" name="TextBox 7"/>
+          <p:cNvPr id="10" name="TextBox 9"/>
           <p:cNvSpPr txBox="1"/>
           <p:nvPr/>
         </p:nvSpPr>
         <p:spPr>
           <a:xfrm>
-            <a:off x="6553047" y="3977639"/>
-            <a:ext cx="4861407" cy="411480"/>
+            <a:off x="6553047" y="4160520"/>
+            <a:ext cx="4998567" cy="411480"/>
           </a:xfrm>
           <a:prstGeom prst="rect">
             <a:avLst/>
@@ -3770,7 +3928,7 @@
             <a:r>
               <a:rPr sz="1600" b="1" i="0">
                 <a:solidFill>
-                  <a:srgbClr val="3B2017"/>
+                  <a:srgbClr val="493027"/>
                 </a:solidFill>
               </a:rPr>
               <a:t>신부</a:t>
@@ -3780,14 +3938,14 @@
       </p:sp>
       <p:sp>
         <p:nvSpPr>
-          <p:cNvPr id="9" name="TextBox 8"/>
+          <p:cNvPr id="11" name="TextBox 10"/>
           <p:cNvSpPr txBox="1"/>
           <p:nvPr/>
         </p:nvSpPr>
         <p:spPr>
           <a:xfrm>
-            <a:off x="6644487" y="4434840"/>
-            <a:ext cx="4678527" cy="1783079"/>
+            <a:off x="6644487" y="4617720"/>
+            <a:ext cx="4815687" cy="1737360"/>
           </a:xfrm>
           <a:prstGeom prst="rect">
             <a:avLst/>
@@ -3860,7 +4018,7 @@
     <p:bg>
       <p:bgPr>
         <a:solidFill>
-          <a:srgbClr val="EFD9D1"/>
+          <a:srgbClr val="F6DED5"/>
         </a:solidFill>
         <a:effectLst/>
       </p:bgPr>
@@ -3874,26 +4032,52 @@
       <p:grpSpPr/>
       <p:sp>
         <p:nvSpPr>
-          <p:cNvPr id="3" name="장식"/>
+          <p:cNvPr id="3" name="포인트"/>
           <p:cNvSpPr/>
           <p:nvPr/>
         </p:nvSpPr>
         <p:spPr>
           <a:xfrm>
-            <a:off x="274320" y="274320"/>
-            <a:ext cx="11643055" cy="6309360"/>
+            <a:off x="5958687" y="246888"/>
+            <a:ext cx="274320" cy="274320"/>
+          </a:xfrm>
+          <a:prstGeom prst="round2SameRect">
+            <a:avLst/>
+          </a:prstGeom>
+          <a:solidFill>
+            <a:srgbClr val="E1AC98"/>
+          </a:solidFill>
+          <a:ln>
+            <a:noFill/>
+          </a:ln>
+        </p:spPr>
+        <p:txBody>
+          <a:bodyPr rtlCol="0" anchor="ctr"/>
+          <a:lstStyle/>
+          <a:p>
+            <a:pPr algn="ctr"/>
+          </a:p>
+        </p:txBody>
+      </p:sp>
+      <p:sp>
+        <p:nvSpPr>
+          <p:cNvPr id="4" name="장식"/>
+          <p:cNvSpPr/>
+          <p:nvPr/>
+        </p:nvSpPr>
+        <p:spPr>
+          <a:xfrm>
+            <a:off x="5684367" y="1572768"/>
+            <a:ext cx="822960" cy="22860"/>
           </a:xfrm>
           <a:prstGeom prst="rect">
             <a:avLst/>
           </a:prstGeom>
           <a:solidFill>
-            <a:srgbClr val="FFFFFF"/>
+            <a:srgbClr val="E1AC98"/>
           </a:solidFill>
-          <a:ln w="25400">
-            <a:solidFill>
-              <a:srgbClr val="7D4531"/>
-            </a:solidFill>
-            <a:prstDash val="dash"/>
+          <a:ln>
+            <a:noFill/>
           </a:ln>
         </p:spPr>
         <p:txBody>
@@ -3906,19 +4090,19 @@
       </p:sp>
       <p:sp>
         <p:nvSpPr>
-          <p:cNvPr id="2" name="Title 1"/>
-          <p:cNvSpPr>
-            <a:spLocks noGrp="1"/>
-          </p:cNvSpPr>
-          <p:nvPr>
-            <p:ph type="title"/>
-          </p:nvPr>
-        </p:nvSpPr>
-        <p:spPr>
-          <a:xfrm>
-            <a:off x="777240" y="548640"/>
-            <a:ext cx="9357055" cy="822960"/>
-          </a:xfrm>
+          <p:cNvPr id="5" name="상단 라벨"/>
+          <p:cNvSpPr txBox="1"/>
+          <p:nvPr/>
+        </p:nvSpPr>
+        <p:spPr>
+          <a:xfrm>
+            <a:off x="640080" y="182880"/>
+            <a:ext cx="3657600" cy="274320"/>
+          </a:xfrm>
+          <a:prstGeom prst="rect">
+            <a:avLst/>
+          </a:prstGeom>
+          <a:noFill/>
         </p:spPr>
         <p:txBody>
           <a:bodyPr wrap="square" lIns="54864" rIns="54864" tIns="27432" bIns="27432" anchor="ctr">
@@ -3927,6 +4111,44 @@
           <a:lstStyle/>
           <a:p>
             <a:pPr algn="l">
+              <a:lnSpc>
+                <a:spcPct val="115000"/>
+              </a:lnSpc>
+            </a:pPr>
+            <a:r>
+              <a:rPr sz="800" b="1" i="0" spc="250">
+                <a:solidFill>
+                  <a:srgbClr val="8E8780"/>
+                </a:solidFill>
+              </a:rPr>
+              <a:t>WEDDING</a:t>
+            </a:r>
+          </a:p>
+        </p:txBody>
+      </p:sp>
+      <p:sp>
+        <p:nvSpPr>
+          <p:cNvPr id="2" name="Title 1"/>
+          <p:cNvSpPr>
+            <a:spLocks noGrp="1"/>
+          </p:cNvSpPr>
+          <p:nvPr>
+            <p:ph type="title"/>
+          </p:nvPr>
+        </p:nvSpPr>
+        <p:spPr>
+          <a:xfrm>
+            <a:off x="1371600" y="640080"/>
+            <a:ext cx="9448495" cy="868680"/>
+          </a:xfrm>
+        </p:spPr>
+        <p:txBody>
+          <a:bodyPr wrap="square" lIns="54864" rIns="54864" tIns="27432" bIns="27432" anchor="ctr">
+            <a:noAutofit/>
+          </a:bodyPr>
+          <a:lstStyle/>
+          <a:p>
+            <a:pPr algn="ctr">
               <a:lnSpc>
                 <a:spcPct val="105000"/>
               </a:lnSpc>
@@ -3934,7 +4156,7 @@
             <a:r>
               <a:rPr sz="3000" b="1" i="0">
                 <a:solidFill>
-                  <a:srgbClr val="3B2017"/>
+                  <a:srgbClr val="26231F"/>
                 </a:solidFill>
               </a:rPr>
               <a:t>우리 두 사람</a:t>
@@ -3944,26 +4166,24 @@
       </p:sp>
       <p:sp>
         <p:nvSpPr>
-          <p:cNvPr id="4" name="왼쪽 칸"/>
+          <p:cNvPr id="6" name="왼쪽 칸"/>
           <p:cNvSpPr/>
           <p:nvPr/>
         </p:nvSpPr>
         <p:spPr>
           <a:xfrm>
-            <a:off x="777240" y="1554480"/>
-            <a:ext cx="5135727" cy="4663440"/>
+            <a:off x="640080" y="1783080"/>
+            <a:ext cx="5272887" cy="4572000"/>
           </a:xfrm>
           <a:prstGeom prst="roundRect">
             <a:avLst>
-              <a:gd name="adj" fmla="val 8000"/>
+              <a:gd name="adj" fmla="val 7000"/>
             </a:avLst>
           </a:prstGeom>
-          <a:solidFill>
-            <a:srgbClr val="F9F3F0"/>
-          </a:solidFill>
-          <a:ln w="12700">
+          <a:noFill/>
+          <a:ln w="15875">
             <a:solidFill>
-              <a:srgbClr val="EFD9D1"/>
+              <a:srgbClr val="E1AC98"/>
             </a:solidFill>
           </a:ln>
         </p:spPr>
@@ -3977,14 +4197,14 @@
       </p:sp>
       <p:sp>
         <p:nvSpPr>
-          <p:cNvPr id="5" name="칸 제목 바"/>
+          <p:cNvPr id="7" name="칸 제목 바"/>
           <p:cNvSpPr/>
           <p:nvPr/>
         </p:nvSpPr>
         <p:spPr>
           <a:xfrm>
-            <a:off x="777240" y="1554480"/>
-            <a:ext cx="5135727" cy="640080"/>
+            <a:off x="640080" y="1783080"/>
+            <a:ext cx="5272887" cy="640080"/>
           </a:xfrm>
           <a:prstGeom prst="roundRect">
             <a:avLst>
@@ -3992,7 +4212,7 @@
             </a:avLst>
           </a:prstGeom>
           <a:solidFill>
-            <a:srgbClr val="7D4531"/>
+            <a:srgbClr val="E1AC98"/>
           </a:solidFill>
           <a:ln>
             <a:noFill/>
@@ -4008,14 +4228,14 @@
       </p:sp>
       <p:sp>
         <p:nvSpPr>
-          <p:cNvPr id="6" name="TextBox 5"/>
+          <p:cNvPr id="8" name="TextBox 7"/>
           <p:cNvSpPr txBox="1"/>
           <p:nvPr/>
         </p:nvSpPr>
         <p:spPr>
           <a:xfrm>
-            <a:off x="960120" y="1554480"/>
-            <a:ext cx="4769967" cy="640080"/>
+            <a:off x="822959" y="1783080"/>
+            <a:ext cx="4907127" cy="640080"/>
           </a:xfrm>
           <a:prstGeom prst="rect">
             <a:avLst/>
@@ -4036,7 +4256,7 @@
             <a:r>
               <a:rPr sz="1800" b="1" i="0">
                 <a:solidFill>
-                  <a:srgbClr val="FFFFFF"/>
+                  <a:srgbClr val="26231F"/>
                 </a:solidFill>
               </a:rPr>
               <a:t>닮은 점</a:t>
@@ -4046,14 +4266,14 @@
       </p:sp>
       <p:sp>
         <p:nvSpPr>
-          <p:cNvPr id="7" name="TextBox 6"/>
+          <p:cNvPr id="9" name="TextBox 8"/>
           <p:cNvSpPr txBox="1"/>
           <p:nvPr/>
         </p:nvSpPr>
         <p:spPr>
           <a:xfrm>
-            <a:off x="1005840" y="2377440"/>
-            <a:ext cx="4678527" cy="3749039"/>
+            <a:off x="868680" y="2606040"/>
+            <a:ext cx="4815687" cy="3657600"/>
           </a:xfrm>
           <a:prstGeom prst="rect">
             <a:avLst/>
@@ -4079,7 +4299,7 @@
             <a:r>
               <a:rPr sz="1500" b="0" i="0">
                 <a:solidFill>
-                  <a:srgbClr val="2B2B2B"/>
+                  <a:srgbClr val="26231F"/>
                 </a:solidFill>
               </a:rPr>
               <a:t>내용을 입력하세요</a:t>
@@ -4099,7 +4319,7 @@
             <a:r>
               <a:rPr sz="1500" b="0" i="0">
                 <a:solidFill>
-                  <a:srgbClr val="2B2B2B"/>
+                  <a:srgbClr val="26231F"/>
                 </a:solidFill>
               </a:rPr>
               <a:t>내용을 입력하세요</a:t>
@@ -4119,7 +4339,7 @@
             <a:r>
               <a:rPr sz="1500" b="0" i="0">
                 <a:solidFill>
-                  <a:srgbClr val="2B2B2B"/>
+                  <a:srgbClr val="26231F"/>
                 </a:solidFill>
               </a:rPr>
               <a:t>내용을 입력하세요</a:t>
@@ -4129,26 +4349,24 @@
       </p:sp>
       <p:sp>
         <p:nvSpPr>
-          <p:cNvPr id="8" name="오른쪽 칸"/>
+          <p:cNvPr id="10" name="오른쪽 칸"/>
           <p:cNvSpPr/>
           <p:nvPr/>
         </p:nvSpPr>
         <p:spPr>
           <a:xfrm>
-            <a:off x="6278727" y="1554480"/>
-            <a:ext cx="5135727" cy="4663440"/>
+            <a:off x="6278727" y="1783080"/>
+            <a:ext cx="5272887" cy="4572000"/>
           </a:xfrm>
           <a:prstGeom prst="roundRect">
             <a:avLst>
-              <a:gd name="adj" fmla="val 8000"/>
+              <a:gd name="adj" fmla="val 7000"/>
             </a:avLst>
           </a:prstGeom>
-          <a:solidFill>
-            <a:srgbClr val="EFD9D1"/>
-          </a:solidFill>
-          <a:ln w="12700">
+          <a:noFill/>
+          <a:ln w="15875">
             <a:solidFill>
-              <a:srgbClr val="EFD9D1"/>
+              <a:srgbClr val="E1AC98"/>
             </a:solidFill>
           </a:ln>
         </p:spPr>
@@ -4162,14 +4380,14 @@
       </p:sp>
       <p:sp>
         <p:nvSpPr>
-          <p:cNvPr id="9" name="칸 제목 바"/>
+          <p:cNvPr id="11" name="칸 제목 바"/>
           <p:cNvSpPr/>
           <p:nvPr/>
         </p:nvSpPr>
         <p:spPr>
           <a:xfrm>
-            <a:off x="6278727" y="1554480"/>
-            <a:ext cx="5135727" cy="640080"/>
+            <a:off x="6278727" y="1783080"/>
+            <a:ext cx="5272887" cy="640080"/>
           </a:xfrm>
           <a:prstGeom prst="roundRect">
             <a:avLst>
@@ -4177,7 +4395,7 @@
             </a:avLst>
           </a:prstGeom>
           <a:solidFill>
-            <a:srgbClr val="3B2017"/>
+            <a:srgbClr val="493027"/>
           </a:solidFill>
           <a:ln>
             <a:noFill/>
@@ -4193,14 +4411,14 @@
       </p:sp>
       <p:sp>
         <p:nvSpPr>
-          <p:cNvPr id="10" name="TextBox 9"/>
+          <p:cNvPr id="12" name="TextBox 11"/>
           <p:cNvSpPr txBox="1"/>
           <p:nvPr/>
         </p:nvSpPr>
         <p:spPr>
           <a:xfrm>
-            <a:off x="6461607" y="1554480"/>
-            <a:ext cx="4769967" cy="640080"/>
+            <a:off x="6461607" y="1783080"/>
+            <a:ext cx="4907127" cy="640080"/>
           </a:xfrm>
           <a:prstGeom prst="rect">
             <a:avLst/>
@@ -4231,14 +4449,14 @@
       </p:sp>
       <p:sp>
         <p:nvSpPr>
-          <p:cNvPr id="11" name="TextBox 10"/>
+          <p:cNvPr id="13" name="TextBox 12"/>
           <p:cNvSpPr txBox="1"/>
           <p:nvPr/>
         </p:nvSpPr>
         <p:spPr>
           <a:xfrm>
-            <a:off x="6507327" y="2377440"/>
-            <a:ext cx="4678527" cy="3749039"/>
+            <a:off x="6507327" y="2606040"/>
+            <a:ext cx="4815687" cy="3657600"/>
           </a:xfrm>
           <a:prstGeom prst="rect">
             <a:avLst/>
@@ -4264,7 +4482,7 @@
             <a:r>
               <a:rPr sz="1500" b="0" i="0">
                 <a:solidFill>
-                  <a:srgbClr val="2B2B2B"/>
+                  <a:srgbClr val="26231F"/>
                 </a:solidFill>
               </a:rPr>
               <a:t>내용을 입력하세요</a:t>
@@ -4284,7 +4502,7 @@
             <a:r>
               <a:rPr sz="1500" b="0" i="0">
                 <a:solidFill>
-                  <a:srgbClr val="2B2B2B"/>
+                  <a:srgbClr val="26231F"/>
                 </a:solidFill>
               </a:rPr>
               <a:t>내용을 입력하세요</a:t>
@@ -4304,7 +4522,7 @@
             <a:r>
               <a:rPr sz="1500" b="0" i="0">
                 <a:solidFill>
-                  <a:srgbClr val="2B2B2B"/>
+                  <a:srgbClr val="26231F"/>
                 </a:solidFill>
               </a:rPr>
               <a:t>내용을 입력하세요</a:t>
@@ -4326,7 +4544,7 @@
     <p:bg>
       <p:bgPr>
         <a:solidFill>
-          <a:srgbClr val="EFD9D1"/>
+          <a:srgbClr val="F6DED5"/>
         </a:solidFill>
         <a:effectLst/>
       </p:bgPr>
@@ -4340,26 +4558,52 @@
       <p:grpSpPr/>
       <p:sp>
         <p:nvSpPr>
-          <p:cNvPr id="3" name="장식"/>
+          <p:cNvPr id="3" name="포인트"/>
           <p:cNvSpPr/>
           <p:nvPr/>
         </p:nvSpPr>
         <p:spPr>
           <a:xfrm>
-            <a:off x="274320" y="274320"/>
-            <a:ext cx="11643055" cy="6309360"/>
+            <a:off x="5958687" y="246888"/>
+            <a:ext cx="274320" cy="274320"/>
+          </a:xfrm>
+          <a:prstGeom prst="round2SameRect">
+            <a:avLst/>
+          </a:prstGeom>
+          <a:solidFill>
+            <a:srgbClr val="E1AC98"/>
+          </a:solidFill>
+          <a:ln>
+            <a:noFill/>
+          </a:ln>
+        </p:spPr>
+        <p:txBody>
+          <a:bodyPr rtlCol="0" anchor="ctr"/>
+          <a:lstStyle/>
+          <a:p>
+            <a:pPr algn="ctr"/>
+          </a:p>
+        </p:txBody>
+      </p:sp>
+      <p:sp>
+        <p:nvSpPr>
+          <p:cNvPr id="4" name="장식"/>
+          <p:cNvSpPr/>
+          <p:nvPr/>
+        </p:nvSpPr>
+        <p:spPr>
+          <a:xfrm>
+            <a:off x="5684367" y="1572768"/>
+            <a:ext cx="822960" cy="22860"/>
           </a:xfrm>
           <a:prstGeom prst="rect">
             <a:avLst/>
           </a:prstGeom>
           <a:solidFill>
-            <a:srgbClr val="FFFFFF"/>
+            <a:srgbClr val="E1AC98"/>
           </a:solidFill>
-          <a:ln w="25400">
-            <a:solidFill>
-              <a:srgbClr val="7D4531"/>
-            </a:solidFill>
-            <a:prstDash val="dash"/>
+          <a:ln>
+            <a:noFill/>
           </a:ln>
         </p:spPr>
         <p:txBody>
@@ -4372,19 +4616,19 @@
       </p:sp>
       <p:sp>
         <p:nvSpPr>
-          <p:cNvPr id="2" name="Title 1"/>
-          <p:cNvSpPr>
-            <a:spLocks noGrp="1"/>
-          </p:cNvSpPr>
-          <p:nvPr>
-            <p:ph type="title"/>
-          </p:nvPr>
-        </p:nvSpPr>
-        <p:spPr>
-          <a:xfrm>
-            <a:off x="777240" y="548640"/>
-            <a:ext cx="9357055" cy="822960"/>
-          </a:xfrm>
+          <p:cNvPr id="5" name="상단 라벨"/>
+          <p:cNvSpPr txBox="1"/>
+          <p:nvPr/>
+        </p:nvSpPr>
+        <p:spPr>
+          <a:xfrm>
+            <a:off x="640080" y="182880"/>
+            <a:ext cx="3657600" cy="274320"/>
+          </a:xfrm>
+          <a:prstGeom prst="rect">
+            <a:avLst/>
+          </a:prstGeom>
+          <a:noFill/>
         </p:spPr>
         <p:txBody>
           <a:bodyPr wrap="square" lIns="54864" rIns="54864" tIns="27432" bIns="27432" anchor="ctr">
@@ -4393,6 +4637,44 @@
           <a:lstStyle/>
           <a:p>
             <a:pPr algn="l">
+              <a:lnSpc>
+                <a:spcPct val="115000"/>
+              </a:lnSpc>
+            </a:pPr>
+            <a:r>
+              <a:rPr sz="800" b="1" i="0" spc="250">
+                <a:solidFill>
+                  <a:srgbClr val="8E8780"/>
+                </a:solidFill>
+              </a:rPr>
+              <a:t>WEDDING</a:t>
+            </a:r>
+          </a:p>
+        </p:txBody>
+      </p:sp>
+      <p:sp>
+        <p:nvSpPr>
+          <p:cNvPr id="2" name="Title 1"/>
+          <p:cNvSpPr>
+            <a:spLocks noGrp="1"/>
+          </p:cNvSpPr>
+          <p:nvPr>
+            <p:ph type="title"/>
+          </p:nvPr>
+        </p:nvSpPr>
+        <p:spPr>
+          <a:xfrm>
+            <a:off x="1371600" y="640080"/>
+            <a:ext cx="9448495" cy="868680"/>
+          </a:xfrm>
+        </p:spPr>
+        <p:txBody>
+          <a:bodyPr wrap="square" lIns="54864" rIns="54864" tIns="27432" bIns="27432" anchor="ctr">
+            <a:noAutofit/>
+          </a:bodyPr>
+          <a:lstStyle/>
+          <a:p>
+            <a:pPr algn="ctr">
               <a:lnSpc>
                 <a:spcPct val="105000"/>
               </a:lnSpc>
@@ -4400,7 +4682,7 @@
             <a:r>
               <a:rPr sz="3000" b="1" i="0">
                 <a:solidFill>
-                  <a:srgbClr val="3B2017"/>
+                  <a:srgbClr val="26231F"/>
                 </a:solidFill>
               </a:rPr>
               <a:t>서로에게 하고 싶은 말</a:t>
@@ -4410,26 +4692,24 @@
       </p:sp>
       <p:sp>
         <p:nvSpPr>
-          <p:cNvPr id="4" name="왼쪽 칸"/>
+          <p:cNvPr id="6" name="왼쪽 칸"/>
           <p:cNvSpPr/>
           <p:nvPr/>
         </p:nvSpPr>
         <p:spPr>
           <a:xfrm>
-            <a:off x="777240" y="1554480"/>
-            <a:ext cx="5135727" cy="4663440"/>
+            <a:off x="640080" y="1783080"/>
+            <a:ext cx="5272887" cy="4572000"/>
           </a:xfrm>
           <a:prstGeom prst="roundRect">
             <a:avLst>
-              <a:gd name="adj" fmla="val 8000"/>
+              <a:gd name="adj" fmla="val 7000"/>
             </a:avLst>
           </a:prstGeom>
-          <a:solidFill>
-            <a:srgbClr val="F9F3F0"/>
-          </a:solidFill>
-          <a:ln w="12700">
+          <a:noFill/>
+          <a:ln w="15875">
             <a:solidFill>
-              <a:srgbClr val="EFD9D1"/>
+              <a:srgbClr val="E1AC98"/>
             </a:solidFill>
           </a:ln>
         </p:spPr>
@@ -4443,14 +4723,14 @@
       </p:sp>
       <p:sp>
         <p:nvSpPr>
-          <p:cNvPr id="5" name="칸 제목 바"/>
+          <p:cNvPr id="7" name="칸 제목 바"/>
           <p:cNvSpPr/>
           <p:nvPr/>
         </p:nvSpPr>
         <p:spPr>
           <a:xfrm>
-            <a:off x="777240" y="1554480"/>
-            <a:ext cx="5135727" cy="640080"/>
+            <a:off x="640080" y="1783080"/>
+            <a:ext cx="5272887" cy="640080"/>
           </a:xfrm>
           <a:prstGeom prst="roundRect">
             <a:avLst>
@@ -4458,7 +4738,7 @@
             </a:avLst>
           </a:prstGeom>
           <a:solidFill>
-            <a:srgbClr val="7D4531"/>
+            <a:srgbClr val="E1AC98"/>
           </a:solidFill>
           <a:ln>
             <a:noFill/>
@@ -4474,14 +4754,14 @@
       </p:sp>
       <p:sp>
         <p:nvSpPr>
-          <p:cNvPr id="6" name="TextBox 5"/>
+          <p:cNvPr id="8" name="TextBox 7"/>
           <p:cNvSpPr txBox="1"/>
           <p:nvPr/>
         </p:nvSpPr>
         <p:spPr>
           <a:xfrm>
-            <a:off x="960120" y="1554480"/>
-            <a:ext cx="4769967" cy="640080"/>
+            <a:off x="822959" y="1783080"/>
+            <a:ext cx="4907127" cy="640080"/>
           </a:xfrm>
           <a:prstGeom prst="rect">
             <a:avLst/>
@@ -4502,7 +4782,7 @@
             <a:r>
               <a:rPr sz="1800" b="1" i="0">
                 <a:solidFill>
-                  <a:srgbClr val="FFFFFF"/>
+                  <a:srgbClr val="26231F"/>
                 </a:solidFill>
               </a:rPr>
               <a:t>신랑이 신부에게</a:t>
@@ -4512,14 +4792,14 @@
       </p:sp>
       <p:sp>
         <p:nvSpPr>
-          <p:cNvPr id="7" name="TextBox 6"/>
+          <p:cNvPr id="9" name="TextBox 8"/>
           <p:cNvSpPr txBox="1"/>
           <p:nvPr/>
         </p:nvSpPr>
         <p:spPr>
           <a:xfrm>
-            <a:off x="1005840" y="2377440"/>
-            <a:ext cx="4678527" cy="3749039"/>
+            <a:off x="868680" y="2606040"/>
+            <a:ext cx="4815687" cy="3657600"/>
           </a:xfrm>
           <a:prstGeom prst="rect">
             <a:avLst/>
@@ -4545,7 +4825,7 @@
             <a:r>
               <a:rPr sz="1500" b="0" i="0">
                 <a:solidFill>
-                  <a:srgbClr val="2B2B2B"/>
+                  <a:srgbClr val="26231F"/>
                 </a:solidFill>
               </a:rPr>
               <a:t>하고 싶은 말을 적어 주세요</a:t>
@@ -4555,26 +4835,24 @@
       </p:sp>
       <p:sp>
         <p:nvSpPr>
-          <p:cNvPr id="8" name="오른쪽 칸"/>
+          <p:cNvPr id="10" name="오른쪽 칸"/>
           <p:cNvSpPr/>
           <p:nvPr/>
         </p:nvSpPr>
         <p:spPr>
           <a:xfrm>
-            <a:off x="6278727" y="1554480"/>
-            <a:ext cx="5135727" cy="4663440"/>
+            <a:off x="6278727" y="1783080"/>
+            <a:ext cx="5272887" cy="4572000"/>
           </a:xfrm>
           <a:prstGeom prst="roundRect">
             <a:avLst>
-              <a:gd name="adj" fmla="val 8000"/>
+              <a:gd name="adj" fmla="val 7000"/>
             </a:avLst>
           </a:prstGeom>
-          <a:solidFill>
-            <a:srgbClr val="EFD9D1"/>
-          </a:solidFill>
-          <a:ln w="12700">
+          <a:noFill/>
+          <a:ln w="15875">
             <a:solidFill>
-              <a:srgbClr val="EFD9D1"/>
+              <a:srgbClr val="E1AC98"/>
             </a:solidFill>
           </a:ln>
         </p:spPr>
@@ -4588,14 +4866,14 @@
       </p:sp>
       <p:sp>
         <p:nvSpPr>
-          <p:cNvPr id="9" name="칸 제목 바"/>
+          <p:cNvPr id="11" name="칸 제목 바"/>
           <p:cNvSpPr/>
           <p:nvPr/>
         </p:nvSpPr>
         <p:spPr>
           <a:xfrm>
-            <a:off x="6278727" y="1554480"/>
-            <a:ext cx="5135727" cy="640080"/>
+            <a:off x="6278727" y="1783080"/>
+            <a:ext cx="5272887" cy="640080"/>
           </a:xfrm>
           <a:prstGeom prst="roundRect">
             <a:avLst>
@@ -4603,7 +4881,7 @@
             </a:avLst>
           </a:prstGeom>
           <a:solidFill>
-            <a:srgbClr val="3B2017"/>
+            <a:srgbClr val="493027"/>
           </a:solidFill>
           <a:ln>
             <a:noFill/>
@@ -4619,14 +4897,14 @@
       </p:sp>
       <p:sp>
         <p:nvSpPr>
-          <p:cNvPr id="10" name="TextBox 9"/>
+          <p:cNvPr id="12" name="TextBox 11"/>
           <p:cNvSpPr txBox="1"/>
           <p:nvPr/>
         </p:nvSpPr>
         <p:spPr>
           <a:xfrm>
-            <a:off x="6461607" y="1554480"/>
-            <a:ext cx="4769967" cy="640080"/>
+            <a:off x="6461607" y="1783080"/>
+            <a:ext cx="4907127" cy="640080"/>
           </a:xfrm>
           <a:prstGeom prst="rect">
             <a:avLst/>
@@ -4657,14 +4935,14 @@
       </p:sp>
       <p:sp>
         <p:nvSpPr>
-          <p:cNvPr id="11" name="TextBox 10"/>
+          <p:cNvPr id="13" name="TextBox 12"/>
           <p:cNvSpPr txBox="1"/>
           <p:nvPr/>
         </p:nvSpPr>
         <p:spPr>
           <a:xfrm>
-            <a:off x="6507327" y="2377440"/>
-            <a:ext cx="4678527" cy="3749039"/>
+            <a:off x="6507327" y="2606040"/>
+            <a:ext cx="4815687" cy="3657600"/>
           </a:xfrm>
           <a:prstGeom prst="rect">
             <a:avLst/>
@@ -4690,7 +4968,7 @@
             <a:r>
               <a:rPr sz="1500" b="0" i="0">
                 <a:solidFill>
-                  <a:srgbClr val="2B2B2B"/>
+                  <a:srgbClr val="26231F"/>
                 </a:solidFill>
               </a:rPr>
               <a:t>하고 싶은 말을 적어 주세요</a:t>
@@ -4712,7 +4990,7 @@
     <p:bg>
       <p:bgPr>
         <a:solidFill>
-          <a:srgbClr val="EFD9D1"/>
+          <a:srgbClr val="F6DED5"/>
         </a:solidFill>
         <a:effectLst/>
       </p:bgPr>
@@ -4726,26 +5004,52 @@
       <p:grpSpPr/>
       <p:sp>
         <p:nvSpPr>
-          <p:cNvPr id="3" name="장식"/>
+          <p:cNvPr id="3" name="포인트"/>
           <p:cNvSpPr/>
           <p:nvPr/>
         </p:nvSpPr>
         <p:spPr>
           <a:xfrm>
-            <a:off x="274320" y="274320"/>
-            <a:ext cx="11643055" cy="6309360"/>
+            <a:off x="5958687" y="246888"/>
+            <a:ext cx="274320" cy="274320"/>
+          </a:xfrm>
+          <a:prstGeom prst="round2SameRect">
+            <a:avLst/>
+          </a:prstGeom>
+          <a:solidFill>
+            <a:srgbClr val="E1AC98"/>
+          </a:solidFill>
+          <a:ln>
+            <a:noFill/>
+          </a:ln>
+        </p:spPr>
+        <p:txBody>
+          <a:bodyPr rtlCol="0" anchor="ctr"/>
+          <a:lstStyle/>
+          <a:p>
+            <a:pPr algn="ctr"/>
+          </a:p>
+        </p:txBody>
+      </p:sp>
+      <p:sp>
+        <p:nvSpPr>
+          <p:cNvPr id="4" name="장식"/>
+          <p:cNvSpPr/>
+          <p:nvPr/>
+        </p:nvSpPr>
+        <p:spPr>
+          <a:xfrm>
+            <a:off x="5684367" y="1572768"/>
+            <a:ext cx="822960" cy="22860"/>
           </a:xfrm>
           <a:prstGeom prst="rect">
             <a:avLst/>
           </a:prstGeom>
           <a:solidFill>
-            <a:srgbClr val="FFFFFF"/>
+            <a:srgbClr val="E1AC98"/>
           </a:solidFill>
-          <a:ln w="25400">
-            <a:solidFill>
-              <a:srgbClr val="7D4531"/>
-            </a:solidFill>
-            <a:prstDash val="dash"/>
+          <a:ln>
+            <a:noFill/>
           </a:ln>
         </p:spPr>
         <p:txBody>
@@ -4758,19 +5062,19 @@
       </p:sp>
       <p:sp>
         <p:nvSpPr>
-          <p:cNvPr id="2" name="Title 1"/>
-          <p:cNvSpPr>
-            <a:spLocks noGrp="1"/>
-          </p:cNvSpPr>
-          <p:nvPr>
-            <p:ph type="title"/>
-          </p:nvPr>
-        </p:nvSpPr>
-        <p:spPr>
-          <a:xfrm>
-            <a:off x="777240" y="548640"/>
-            <a:ext cx="9357055" cy="822960"/>
-          </a:xfrm>
+          <p:cNvPr id="5" name="상단 라벨"/>
+          <p:cNvSpPr txBox="1"/>
+          <p:nvPr/>
+        </p:nvSpPr>
+        <p:spPr>
+          <a:xfrm>
+            <a:off x="640080" y="182880"/>
+            <a:ext cx="3657600" cy="274320"/>
+          </a:xfrm>
+          <a:prstGeom prst="rect">
+            <a:avLst/>
+          </a:prstGeom>
+          <a:noFill/>
         </p:spPr>
         <p:txBody>
           <a:bodyPr wrap="square" lIns="54864" rIns="54864" tIns="27432" bIns="27432" anchor="ctr">
@@ -4779,6 +5083,44 @@
           <a:lstStyle/>
           <a:p>
             <a:pPr algn="l">
+              <a:lnSpc>
+                <a:spcPct val="115000"/>
+              </a:lnSpc>
+            </a:pPr>
+            <a:r>
+              <a:rPr sz="800" b="1" i="0" spc="250">
+                <a:solidFill>
+                  <a:srgbClr val="8E8780"/>
+                </a:solidFill>
+              </a:rPr>
+              <a:t>WEDDING</a:t>
+            </a:r>
+          </a:p>
+        </p:txBody>
+      </p:sp>
+      <p:sp>
+        <p:nvSpPr>
+          <p:cNvPr id="2" name="Title 1"/>
+          <p:cNvSpPr>
+            <a:spLocks noGrp="1"/>
+          </p:cNvSpPr>
+          <p:nvPr>
+            <p:ph type="title"/>
+          </p:nvPr>
+        </p:nvSpPr>
+        <p:spPr>
+          <a:xfrm>
+            <a:off x="1371600" y="640080"/>
+            <a:ext cx="9448495" cy="868680"/>
+          </a:xfrm>
+        </p:spPr>
+        <p:txBody>
+          <a:bodyPr wrap="square" lIns="54864" rIns="54864" tIns="27432" bIns="27432" anchor="ctr">
+            <a:noAutofit/>
+          </a:bodyPr>
+          <a:lstStyle/>
+          <a:p>
+            <a:pPr algn="ctr">
               <a:lnSpc>
                 <a:spcPct val="105000"/>
               </a:lnSpc>
@@ -4786,7 +5128,7 @@
             <a:r>
               <a:rPr sz="3000" b="1" i="0">
                 <a:solidFill>
-                  <a:srgbClr val="3B2017"/>
+                  <a:srgbClr val="26231F"/>
                 </a:solidFill>
               </a:rPr>
               <a:t>웨딩 사진</a:t>
@@ -4796,14 +5138,14 @@
       </p:sp>
       <p:sp>
         <p:nvSpPr>
-          <p:cNvPr id="4" name="사진 자리"/>
+          <p:cNvPr id="6" name="사진 자리"/>
           <p:cNvSpPr/>
           <p:nvPr/>
         </p:nvSpPr>
         <p:spPr>
           <a:xfrm>
-            <a:off x="777240" y="1554480"/>
-            <a:ext cx="3423818" cy="2240279"/>
+            <a:off x="640080" y="1783080"/>
+            <a:ext cx="3515258" cy="2194560"/>
           </a:xfrm>
           <a:prstGeom prst="roundRect">
             <a:avLst>
@@ -4811,12 +5153,10 @@
             </a:avLst>
           </a:prstGeom>
           <a:solidFill>
-            <a:srgbClr val="EFD9D1"/>
+            <a:srgbClr val="F6DED5"/>
           </a:solidFill>
           <a:ln w="19050">
-            <a:solidFill>
-              <a:srgbClr val="7D4531"/>
-            </a:solidFill>
+            <a:noFill/>
             <a:prstDash val="dash"/>
           </a:ln>
         </p:spPr>
@@ -4834,7 +5174,7 @@
             <a:r>
               <a:rPr sz="1200" b="0" i="0">
                 <a:solidFill>
-                  <a:srgbClr val="3B2017"/>
+                  <a:srgbClr val="8E8780"/>
                 </a:solidFill>
               </a:rPr>
               <a:t>사진 1</a:t>
@@ -4844,14 +5184,14 @@
       </p:sp>
       <p:sp>
         <p:nvSpPr>
-          <p:cNvPr id="5" name="사진 자리"/>
+          <p:cNvPr id="7" name="사진 자리"/>
           <p:cNvSpPr/>
           <p:nvPr/>
         </p:nvSpPr>
         <p:spPr>
           <a:xfrm>
-            <a:off x="4383938" y="1554480"/>
-            <a:ext cx="3423818" cy="2240279"/>
+            <a:off x="4338218" y="1783080"/>
+            <a:ext cx="3515258" cy="2194560"/>
           </a:xfrm>
           <a:prstGeom prst="roundRect">
             <a:avLst>
@@ -4859,12 +5199,10 @@
             </a:avLst>
           </a:prstGeom>
           <a:solidFill>
-            <a:srgbClr val="EFD9D1"/>
+            <a:srgbClr val="F6DED5"/>
           </a:solidFill>
           <a:ln w="19050">
-            <a:solidFill>
-              <a:srgbClr val="7D4531"/>
-            </a:solidFill>
+            <a:noFill/>
             <a:prstDash val="dash"/>
           </a:ln>
         </p:spPr>
@@ -4882,7 +5220,7 @@
             <a:r>
               <a:rPr sz="1200" b="0" i="0">
                 <a:solidFill>
-                  <a:srgbClr val="3B2017"/>
+                  <a:srgbClr val="8E8780"/>
                 </a:solidFill>
               </a:rPr>
               <a:t>사진 2</a:t>
@@ -4892,14 +5230,14 @@
       </p:sp>
       <p:sp>
         <p:nvSpPr>
-          <p:cNvPr id="6" name="사진 자리"/>
+          <p:cNvPr id="8" name="사진 자리"/>
           <p:cNvSpPr/>
           <p:nvPr/>
         </p:nvSpPr>
         <p:spPr>
           <a:xfrm>
-            <a:off x="7990636" y="1554480"/>
-            <a:ext cx="3423818" cy="2240279"/>
+            <a:off x="8036356" y="1783080"/>
+            <a:ext cx="3515258" cy="2194560"/>
           </a:xfrm>
           <a:prstGeom prst="roundRect">
             <a:avLst>
@@ -4907,12 +5245,10 @@
             </a:avLst>
           </a:prstGeom>
           <a:solidFill>
-            <a:srgbClr val="EFD9D1"/>
+            <a:srgbClr val="F6DED5"/>
           </a:solidFill>
           <a:ln w="19050">
-            <a:solidFill>
-              <a:srgbClr val="7D4531"/>
-            </a:solidFill>
+            <a:noFill/>
             <a:prstDash val="dash"/>
           </a:ln>
         </p:spPr>
@@ -4930,7 +5266,7 @@
             <a:r>
               <a:rPr sz="1200" b="0" i="0">
                 <a:solidFill>
-                  <a:srgbClr val="3B2017"/>
+                  <a:srgbClr val="8E8780"/>
                 </a:solidFill>
               </a:rPr>
               <a:t>사진 3</a:t>
@@ -4940,14 +5276,14 @@
       </p:sp>
       <p:sp>
         <p:nvSpPr>
-          <p:cNvPr id="7" name="사진 자리"/>
+          <p:cNvPr id="9" name="사진 자리"/>
           <p:cNvSpPr/>
           <p:nvPr/>
         </p:nvSpPr>
         <p:spPr>
           <a:xfrm>
-            <a:off x="777240" y="3977639"/>
-            <a:ext cx="3423818" cy="2240279"/>
+            <a:off x="640080" y="4160520"/>
+            <a:ext cx="3515258" cy="2194560"/>
           </a:xfrm>
           <a:prstGeom prst="roundRect">
             <a:avLst>
@@ -4955,12 +5291,10 @@
             </a:avLst>
           </a:prstGeom>
           <a:solidFill>
-            <a:srgbClr val="EFD9D1"/>
+            <a:srgbClr val="F6DED5"/>
           </a:solidFill>
           <a:ln w="19050">
-            <a:solidFill>
-              <a:srgbClr val="7D4531"/>
-            </a:solidFill>
+            <a:noFill/>
             <a:prstDash val="dash"/>
           </a:ln>
         </p:spPr>
@@ -4978,7 +5312,7 @@
             <a:r>
               <a:rPr sz="1200" b="0" i="0">
                 <a:solidFill>
-                  <a:srgbClr val="3B2017"/>
+                  <a:srgbClr val="8E8780"/>
                 </a:solidFill>
               </a:rPr>
               <a:t>사진 4</a:t>
@@ -4988,14 +5322,14 @@
       </p:sp>
       <p:sp>
         <p:nvSpPr>
-          <p:cNvPr id="8" name="사진 자리"/>
+          <p:cNvPr id="10" name="사진 자리"/>
           <p:cNvSpPr/>
           <p:nvPr/>
         </p:nvSpPr>
         <p:spPr>
           <a:xfrm>
-            <a:off x="4383938" y="3977639"/>
-            <a:ext cx="3423818" cy="2240279"/>
+            <a:off x="4338218" y="4160520"/>
+            <a:ext cx="3515258" cy="2194560"/>
           </a:xfrm>
           <a:prstGeom prst="roundRect">
             <a:avLst>
@@ -5003,12 +5337,10 @@
             </a:avLst>
           </a:prstGeom>
           <a:solidFill>
-            <a:srgbClr val="EFD9D1"/>
+            <a:srgbClr val="F6DED5"/>
           </a:solidFill>
           <a:ln w="19050">
-            <a:solidFill>
-              <a:srgbClr val="7D4531"/>
-            </a:solidFill>
+            <a:noFill/>
             <a:prstDash val="dash"/>
           </a:ln>
         </p:spPr>
@@ -5026,7 +5358,7 @@
             <a:r>
               <a:rPr sz="1200" b="0" i="0">
                 <a:solidFill>
-                  <a:srgbClr val="3B2017"/>
+                  <a:srgbClr val="8E8780"/>
                 </a:solidFill>
               </a:rPr>
               <a:t>사진 5</a:t>
@@ -5036,14 +5368,14 @@
       </p:sp>
       <p:sp>
         <p:nvSpPr>
-          <p:cNvPr id="9" name="사진 자리"/>
+          <p:cNvPr id="11" name="사진 자리"/>
           <p:cNvSpPr/>
           <p:nvPr/>
         </p:nvSpPr>
         <p:spPr>
           <a:xfrm>
-            <a:off x="7990636" y="3977639"/>
-            <a:ext cx="3423818" cy="2240279"/>
+            <a:off x="8036356" y="4160520"/>
+            <a:ext cx="3515258" cy="2194560"/>
           </a:xfrm>
           <a:prstGeom prst="roundRect">
             <a:avLst>
@@ -5051,12 +5383,10 @@
             </a:avLst>
           </a:prstGeom>
           <a:solidFill>
-            <a:srgbClr val="EFD9D1"/>
+            <a:srgbClr val="F6DED5"/>
           </a:solidFill>
           <a:ln w="19050">
-            <a:solidFill>
-              <a:srgbClr val="7D4531"/>
-            </a:solidFill>
+            <a:noFill/>
             <a:prstDash val="dash"/>
           </a:ln>
         </p:spPr>
@@ -5074,7 +5404,7 @@
             <a:r>
               <a:rPr sz="1200" b="0" i="0">
                 <a:solidFill>
-                  <a:srgbClr val="3B2017"/>
+                  <a:srgbClr val="8E8780"/>
                 </a:solidFill>
               </a:rPr>
               <a:t>사진 6</a:t>
@@ -5093,6 +5423,14 @@
 <file path=ppt/slides/slide6.xml><?xml version="1.0" encoding="utf-8"?>
 <p:sld xmlns:a="http://schemas.openxmlformats.org/drawingml/2006/main" xmlns:p="http://schemas.openxmlformats.org/presentationml/2006/main" xmlns:r="http://schemas.openxmlformats.org/officeDocument/2006/relationships">
   <p:cSld>
+    <p:bg>
+      <p:bgPr>
+        <a:solidFill>
+          <a:srgbClr val="FBF0EC"/>
+        </a:solidFill>
+        <a:effectLst/>
+      </p:bgPr>
+    </p:bg>
     <p:spTree>
       <p:nvGrpSpPr>
         <p:cNvPr id="1" name=""/>
@@ -5100,30 +5438,120 @@
         <p:nvPr/>
       </p:nvGrpSpPr>
       <p:grpSpPr/>
-      <p:pic>
-        <p:nvPicPr>
-          <p:cNvPr id="3" name="표지 그림" descr="wedding-41.jpg"/>
-          <p:cNvPicPr>
-            <a:picLocks noChangeAspect="1"/>
-          </p:cNvPicPr>
+      <p:sp>
+        <p:nvSpPr>
+          <p:cNvPr id="3" name="사진 자리"/>
+          <p:cNvSpPr/>
           <p:nvPr/>
-        </p:nvPicPr>
-        <p:blipFill>
-          <a:blip r:embed="rId2"/>
-          <a:stretch>
-            <a:fillRect/>
-          </a:stretch>
-        </p:blipFill>
-        <p:spPr>
-          <a:xfrm>
-            <a:off x="0" y="0"/>
-            <a:ext cx="12191695" cy="6858000"/>
+        </p:nvSpPr>
+        <p:spPr>
+          <a:xfrm>
+            <a:off x="1463003" y="960120"/>
+            <a:ext cx="3657508" cy="4526280"/>
+          </a:xfrm>
+          <a:prstGeom prst="roundRect">
+            <a:avLst>
+              <a:gd name="adj" fmla="val 4000"/>
+            </a:avLst>
+          </a:prstGeom>
+          <a:solidFill>
+            <a:srgbClr val="EBBEAD"/>
+          </a:solidFill>
+          <a:ln>
+            <a:noFill/>
+          </a:ln>
+        </p:spPr>
+        <p:txBody>
+          <a:bodyPr rtlCol="0" anchor="ctr" wrap="square" lIns="54864" rIns="54864" tIns="27432" bIns="27432">
+            <a:noAutofit/>
+          </a:bodyPr>
+          <a:lstStyle/>
+          <a:p>
+            <a:pPr algn="ctr">
+              <a:lnSpc>
+                <a:spcPct val="100000"/>
+              </a:lnSpc>
+            </a:pPr>
+            <a:r>
+              <a:rPr sz="1400" b="0" i="0">
+                <a:solidFill>
+                  <a:srgbClr val="493027"/>
+                </a:solidFill>
+              </a:rPr>
+              <a:t>사진을 넣어 주세요</a:t>
+            </a:r>
+          </a:p>
+        </p:txBody>
+      </p:sp>
+      <p:sp>
+        <p:nvSpPr>
+          <p:cNvPr id="4" name="장식"/>
+          <p:cNvSpPr/>
+          <p:nvPr/>
+        </p:nvSpPr>
+        <p:spPr>
+          <a:xfrm>
+            <a:off x="975335" y="1234439"/>
+            <a:ext cx="3657508" cy="4526280"/>
+          </a:xfrm>
+          <a:prstGeom prst="roundRect">
+            <a:avLst>
+              <a:gd name="adj" fmla="val 4000"/>
+            </a:avLst>
+          </a:prstGeom>
+          <a:noFill/>
+          <a:ln w="9525">
+            <a:solidFill>
+              <a:srgbClr val="26231F"/>
+            </a:solidFill>
+          </a:ln>
+        </p:spPr>
+        <p:txBody>
+          <a:bodyPr rtlCol="0" anchor="ctr"/>
+          <a:lstStyle/>
+          <a:p>
+            <a:pPr algn="ctr"/>
+          </a:p>
+        </p:txBody>
+      </p:sp>
+      <p:sp>
+        <p:nvSpPr>
+          <p:cNvPr id="5" name="라벨"/>
+          <p:cNvSpPr txBox="1"/>
+          <p:nvPr/>
+        </p:nvSpPr>
+        <p:spPr>
+          <a:xfrm>
+            <a:off x="6827349" y="2148840"/>
+            <a:ext cx="4632844" cy="274320"/>
           </a:xfrm>
           <a:prstGeom prst="rect">
             <a:avLst/>
           </a:prstGeom>
-        </p:spPr>
-      </p:pic>
+          <a:noFill/>
+        </p:spPr>
+        <p:txBody>
+          <a:bodyPr wrap="square" lIns="54864" rIns="54864" tIns="27432" bIns="27432" anchor="t">
+            <a:noAutofit/>
+          </a:bodyPr>
+          <a:lstStyle/>
+          <a:p>
+            <a:pPr algn="l">
+              <a:lnSpc>
+                <a:spcPct val="115000"/>
+              </a:lnSpc>
+            </a:pPr>
+            <a:r>
+              <a:rPr sz="1000" b="1" i="0" spc="250">
+                <a:solidFill>
+                  <a:srgbClr val="26231F"/>
+                </a:solidFill>
+              </a:rPr>
+              <a:t>WEDDING</a:t>
+            </a:r>
+          </a:p>
+        </p:txBody>
+      </p:sp>
       <p:sp>
         <p:nvSpPr>
           <p:cNvPr id="2" name="Title 1"/>
@@ -5136,8 +5564,8 @@
         </p:nvSpPr>
         <p:spPr>
           <a:xfrm>
-            <a:off x="853418" y="2057400"/>
-            <a:ext cx="6095847" cy="1554480"/>
+            <a:off x="6827349" y="2606040"/>
+            <a:ext cx="4632844" cy="1188720"/>
           </a:xfrm>
         </p:spPr>
         <p:txBody>
@@ -5154,7 +5582,7 @@
             <a:r>
               <a:rPr sz="3400" b="1" i="0">
                 <a:solidFill>
-                  <a:srgbClr val="3B2017"/>
+                  <a:srgbClr val="26231F"/>
                 </a:solidFill>
               </a:rPr>
               <a:t>와 주셔서 고맙습니다</a:t>
@@ -5164,14 +5592,14 @@
       </p:sp>
       <p:sp>
         <p:nvSpPr>
-          <p:cNvPr id="4" name="한 줄 문구"/>
+          <p:cNvPr id="6" name="한 줄 문구"/>
           <p:cNvSpPr txBox="1"/>
           <p:nvPr/>
         </p:nvSpPr>
         <p:spPr>
           <a:xfrm>
-            <a:off x="853418" y="3749039"/>
-            <a:ext cx="6095847" cy="822960"/>
+            <a:off x="6827349" y="3886200"/>
+            <a:ext cx="4632844" cy="822960"/>
           </a:xfrm>
           <a:prstGeom prst="rect">
             <a:avLst/>
@@ -5190,9 +5618,9 @@
               </a:lnSpc>
             </a:pPr>
             <a:r>
-              <a:rPr sz="1700" b="0" i="1">
-                <a:solidFill>
-                  <a:srgbClr val="3B2017"/>
+              <a:rPr sz="1700" b="0" i="0">
+                <a:solidFill>
+                  <a:srgbClr val="26231F"/>
                 </a:solidFill>
               </a:rPr>
               <a:t>잘 살겠습니다</a:t>
@@ -5202,14 +5630,14 @@
       </p:sp>
       <p:sp>
         <p:nvSpPr>
-          <p:cNvPr id="5" name="안내 문구"/>
+          <p:cNvPr id="7" name="안내 문구"/>
           <p:cNvSpPr txBox="1"/>
           <p:nvPr/>
         </p:nvSpPr>
         <p:spPr>
           <a:xfrm>
-            <a:off x="853418" y="4617720"/>
-            <a:ext cx="6095847" cy="914400"/>
+            <a:off x="6827349" y="4754880"/>
+            <a:ext cx="4632844" cy="914400"/>
           </a:xfrm>
           <a:prstGeom prst="rect">
             <a:avLst/>
@@ -5230,7 +5658,7 @@
             <a:r>
               <a:rPr sz="1400" b="0" i="0">
                 <a:solidFill>
-                  <a:srgbClr val="666666"/>
+                  <a:srgbClr val="26231F"/>
                 </a:solidFill>
               </a:rPr>
               <a:t>신랑 이름 ♥ 신부 이름</a:t>
@@ -5257,34 +5685,34 @@
         <a:sysClr val="window" lastClr="FFFFFF"/>
       </a:lt1>
       <a:dk2>
-        <a:srgbClr val="3B2017"/>
+        <a:srgbClr val="493027"/>
       </a:dk2>
       <a:lt2>
-        <a:srgbClr val="F9F3F0"/>
+        <a:srgbClr val="FBF0EC"/>
       </a:lt2>
       <a:accent1>
-        <a:srgbClr val="7D4531"/>
+        <a:srgbClr val="E1AC98"/>
       </a:accent1>
       <a:accent2>
-        <a:srgbClr val="3B917D"/>
+        <a:srgbClr val="EADDB8"/>
       </a:accent2>
       <a:accent3>
-        <a:srgbClr val="3B2017"/>
+        <a:srgbClr val="493027"/>
       </a:accent3>
       <a:accent4>
-        <a:srgbClr val="EFD9D1"/>
+        <a:srgbClr val="F6DED5"/>
       </a:accent4>
       <a:accent5>
-        <a:srgbClr val="5C6B57"/>
+        <a:srgbClr val="E6C4A8"/>
       </a:accent5>
       <a:accent6>
-        <a:srgbClr val="897974"/>
+        <a:srgbClr val="92837D"/>
       </a:accent6>
       <a:hlink>
-        <a:srgbClr val="7D4531"/>
+        <a:srgbClr val="E1AC98"/>
       </a:hlink>
       <a:folHlink>
-        <a:srgbClr val="3B2017"/>
+        <a:srgbClr val="493027"/>
       </a:folHlink>
     </a:clrScheme>
     <a:fontScheme name="Office">
